--- a/slides/release/06-prompt-systems-governance.pptx
+++ b/slides/release/06-prompt-systems-governance.pptx
@@ -2499,7 +2499,7 @@
         </p:nvSpPr>
         <p:spPr>
           <a:xfrm>
-            <a:off x="495300" y="5977731"/>
+            <a:off x="694563" y="6053931"/>
             <a:ext cx="7507224" cy="566928"/>
           </a:xfrm>
           <a:prstGeom prst="rect">
@@ -2624,7 +2624,7 @@
               <a:t> Save</a:t>
             </a:r>
             <a:r>
-              <a:t> it as a Project / Custom GPT / Gem so anyone can run it.</a:t>
+              <a:t> it as a Custom GPT / Project / Gem so anyone can run it.</a:t>
             </a:r>
           </a:p>
           <a:p>
@@ -2685,7 +2685,7 @@
         </p:nvSpPr>
         <p:spPr>
           <a:xfrm>
-            <a:off x="495300" y="6282531"/>
+            <a:off x="670750" y="6425063"/>
             <a:ext cx="7507224" cy="877824"/>
           </a:xfrm>
           <a:prstGeom prst="rect">
@@ -2856,7 +2856,7 @@
             </a:r>
             <a:r>
               <a:rPr b="1"/>
-              <a:t> Project / Custom GPT / Gem</a:t>
+              <a:t> Custom GPT / Project / Gem</a:t>
             </a:r>
             <a:r>
               <a:t> .</a:t>
@@ -2921,7 +2921,7 @@
         </p:nvSpPr>
         <p:spPr>
           <a:xfrm>
-            <a:off x="342900" y="6627481"/>
+            <a:off x="713613" y="7098030"/>
             <a:ext cx="7507224" cy="877824"/>
           </a:xfrm>
           <a:prstGeom prst="rect">
@@ -3142,7 +3142,7 @@
         </p:nvSpPr>
         <p:spPr>
           <a:xfrm>
-            <a:off x="723138" y="6282531"/>
+            <a:off x="571500" y="7066393"/>
             <a:ext cx="7507224" cy="877824"/>
           </a:xfrm>
           <a:prstGeom prst="rect">
@@ -3391,7 +3391,7 @@
         </p:nvSpPr>
         <p:spPr>
           <a:xfrm>
-            <a:off x="419100" y="7018159"/>
+            <a:off x="704088" y="6945602"/>
             <a:ext cx="7507224" cy="877824"/>
           </a:xfrm>
           <a:prstGeom prst="rect">
@@ -3585,7 +3585,7 @@
         </p:blipFill>
         <p:spPr>
           <a:xfrm>
-            <a:off x="220662" y="2402258"/>
+            <a:off x="0" y="2320131"/>
             <a:ext cx="8915400" cy="658344"/>
           </a:xfrm>
           <a:prstGeom prst="rect">
@@ -3601,7 +3601,7 @@
         </p:nvSpPr>
         <p:spPr>
           <a:xfrm>
-            <a:off x="571500" y="6627481"/>
+            <a:off x="571500" y="6739731"/>
             <a:ext cx="7507224" cy="877824"/>
           </a:xfrm>
           <a:prstGeom prst="rect">
@@ -3715,20 +3715,20 @@
             <a:pPr lvl="1"/>
             <a:r>
               <a:rPr b="1"/>
+              <a:t> ChatGPT → Custom GPTs / Projects</a:t>
+            </a:r>
+            <a:r>
+              <a:t> — a named assistant with baked-in instructions and files (our class tool).</a:t>
+            </a:r>
+          </a:p>
+          <a:p>
+            <a:pPr lvl="1"/>
+            <a:r>
+              <a:rPr b="1"/>
               <a:t> Claude → Projects</a:t>
             </a:r>
             <a:r>
               <a:t> — persistent instructions + reference files for a body of work.</a:t>
-            </a:r>
-          </a:p>
-          <a:p>
-            <a:pPr lvl="1"/>
-            <a:r>
-              <a:rPr b="1"/>
-              <a:t> ChatGPT → Custom GPTs</a:t>
-            </a:r>
-            <a:r>
-              <a:t> — a named assistant with baked-in instructions and files.</a:t>
             </a:r>
           </a:p>
           <a:p>
@@ -3799,7 +3799,7 @@
         </p:nvSpPr>
         <p:spPr>
           <a:xfrm>
-            <a:off x="689800" y="6130131"/>
+            <a:off x="495300" y="6863975"/>
             <a:ext cx="7507224" cy="877824"/>
           </a:xfrm>
           <a:prstGeom prst="rect">
@@ -3999,7 +3999,7 @@
         </p:nvSpPr>
         <p:spPr>
           <a:xfrm>
-            <a:off x="571500" y="6459194"/>
+            <a:off x="704088" y="6647324"/>
             <a:ext cx="7507224" cy="877824"/>
           </a:xfrm>
           <a:prstGeom prst="rect">
@@ -4207,7 +4207,7 @@
         </p:nvSpPr>
         <p:spPr>
           <a:xfrm>
-            <a:off x="718375" y="6627481"/>
+            <a:off x="675513" y="6863975"/>
             <a:ext cx="7507224" cy="877824"/>
           </a:xfrm>
           <a:prstGeom prst="rect">
@@ -4242,7 +4242,7 @@
           <a:p>
             <a:pPr algn="ctr"/>
             <a:r>
-              <a:rPr sz="1800" i="1" dirty="0">
+              <a:rPr sz="1800" i="1">
                 <a:solidFill>
                   <a:srgbClr val="333333"/>
                 </a:solidFill>
@@ -4417,7 +4417,7 @@
         </p:nvSpPr>
         <p:spPr>
           <a:xfrm>
-            <a:off x="689800" y="6206331"/>
+            <a:off x="571500" y="6863975"/>
             <a:ext cx="7507224" cy="877824"/>
           </a:xfrm>
           <a:prstGeom prst="rect">
